--- a/slides/ch16-leadership-under-pressure-influence.pptx
+++ b/slides/ch16-leadership-under-pressure-influence.pptx
@@ -1373,7 +1373,7 @@
           <a:lstStyle/>
           <a:p>
             <a:r>
-              <a:t>The 'I may be wrong' opener is Carnegie verbatim and still the best de-escalating preface in professional life. The on-the-record exception keeps this honest — some corrections must land publicly.</a:t>
+              <a:t>The 'I may be wrong' opener is a paraphrase of Carnegie's advice and still the best de-escalating preface in professional life. The on-the-record exception keeps this honest — some corrections must land publicly.</a:t>
             </a:r>
           </a:p>
         </p:txBody>
@@ -7599,7 +7599,7 @@
                 </a:solidFill>
                 <a:latin typeface="Calibri"/>
               </a:rPr>
-              <a:t>The five-S goodwill note (Chapter 6) IS this principle with a stamp — specific, true, and wanted more than almost anything.</a:t>
+              <a:t>The five-quality goodwill note (Chapter 6) IS this principle with a stamp — specific, true, and wanted more than almost anything.</a:t>
             </a:r>
           </a:p>
         </p:txBody>
@@ -9962,7 +9962,7 @@
                 </a:solidFill>
                 <a:latin typeface="Calibri"/>
               </a:rPr>
-              <a:t>a drop of honey before the business (Carnegie's phrase) is the buffer (Chapter 7) applied to every hard conversation, not just bad news.</a:t>
+              <a:t>a drop of honey before the business (the Lincoln line Carnegie loved to quote) is the buffer (Chapter 7) applied to every hard conversation, not just bad news.</a:t>
             </a:r>
           </a:p>
           <a:p>

--- a/slides/ch16-leadership-under-pressure-influence.pptx
+++ b/slides/ch16-leadership-under-pressure-influence.pptx
@@ -5955,7 +5955,7 @@
                 </a:solidFill>
                 <a:latin typeface="Calibri"/>
               </a:rPr>
-              <a:t>BADM 225 · Chapter 16</a:t>
+              <a:t>BADM 225 · Chapter 16  ·  © Derek D. Bussan</a:t>
             </a:r>
           </a:p>
         </p:txBody>
@@ -6242,7 +6242,7 @@
                 </a:solidFill>
                 <a:latin typeface="Calibri"/>
               </a:rPr>
-              <a:t>BADM 225 · Chapter 16</a:t>
+              <a:t>BADM 225 · Chapter 16  ·  © Derek D. Bussan</a:t>
             </a:r>
           </a:p>
         </p:txBody>
@@ -6529,7 +6529,7 @@
                 </a:solidFill>
                 <a:latin typeface="Calibri"/>
               </a:rPr>
-              <a:t>BADM 225 · Chapter 16</a:t>
+              <a:t>BADM 225 · Chapter 16  ·  © Derek D. Bussan</a:t>
             </a:r>
           </a:p>
         </p:txBody>
@@ -6894,7 +6894,7 @@
                 </a:solidFill>
                 <a:latin typeface="Calibri"/>
               </a:rPr>
-              <a:t>BADM 225 · Chapter 16</a:t>
+              <a:t>BADM 225 · Chapter 16  ·  © Derek D. Bussan</a:t>
             </a:r>
           </a:p>
         </p:txBody>
@@ -7022,7 +7022,7 @@
                 </a:solidFill>
                 <a:latin typeface="Calibri"/>
               </a:rPr>
-              <a:t>BADM 225 · Chapter 16</a:t>
+              <a:t>BADM 225 · Chapter 16  ·  © Derek D. Bussan</a:t>
             </a:r>
           </a:p>
         </p:txBody>
@@ -7309,7 +7309,7 @@
                 </a:solidFill>
                 <a:latin typeface="Calibri"/>
               </a:rPr>
-              <a:t>BADM 225 · Chapter 16</a:t>
+              <a:t>BADM 225 · Chapter 16  ·  © Derek D. Bussan</a:t>
             </a:r>
           </a:p>
         </p:txBody>
@@ -7908,7 +7908,7 @@
                 </a:solidFill>
                 <a:latin typeface="Calibri"/>
               </a:rPr>
-              <a:t>BADM 225 · Chapter 16</a:t>
+              <a:t>BADM 225 · Chapter 16  ·  © Derek D. Bussan</a:t>
             </a:r>
           </a:p>
         </p:txBody>
@@ -8195,7 +8195,7 @@
                 </a:solidFill>
                 <a:latin typeface="Calibri"/>
               </a:rPr>
-              <a:t>BADM 225 · Chapter 16</a:t>
+              <a:t>BADM 225 · Chapter 16  ·  © Derek D. Bussan</a:t>
             </a:r>
           </a:p>
         </p:txBody>
@@ -8560,7 +8560,7 @@
                 </a:solidFill>
                 <a:latin typeface="Calibri"/>
               </a:rPr>
-              <a:t>BADM 225 · Chapter 16</a:t>
+              <a:t>BADM 225 · Chapter 16  ·  © Derek D. Bussan</a:t>
             </a:r>
           </a:p>
         </p:txBody>
@@ -8688,7 +8688,7 @@
                 </a:solidFill>
                 <a:latin typeface="Calibri"/>
               </a:rPr>
-              <a:t>BADM 225 · Chapter 16</a:t>
+              <a:t>BADM 225 · Chapter 16  ·  © Derek D. Bussan</a:t>
             </a:r>
           </a:p>
         </p:txBody>
@@ -8975,7 +8975,7 @@
                 </a:solidFill>
                 <a:latin typeface="Calibri"/>
               </a:rPr>
-              <a:t>BADM 225 · Chapter 16</a:t>
+              <a:t>BADM 225 · Chapter 16  ·  © Derek D. Bussan</a:t>
             </a:r>
           </a:p>
         </p:txBody>
@@ -9296,7 +9296,7 @@
                 </a:solidFill>
                 <a:latin typeface="Calibri"/>
               </a:rPr>
-              <a:t>BADM 225 · Chapter 16</a:t>
+              <a:t>BADM 225 · Chapter 16  ·  © Derek D. Bussan</a:t>
             </a:r>
           </a:p>
         </p:txBody>
@@ -9583,7 +9583,7 @@
                 </a:solidFill>
                 <a:latin typeface="Calibri"/>
               </a:rPr>
-              <a:t>BADM 225 · Chapter 16</a:t>
+              <a:t>BADM 225 · Chapter 16  ·  © Derek D. Bussan</a:t>
             </a:r>
           </a:p>
         </p:txBody>
@@ -9870,7 +9870,7 @@
                 </a:solidFill>
                 <a:latin typeface="Calibri"/>
               </a:rPr>
-              <a:t>BADM 225 · Chapter 16</a:t>
+              <a:t>BADM 225 · Chapter 16  ·  © Derek D. Bussan</a:t>
             </a:r>
           </a:p>
         </p:txBody>
@@ -10157,7 +10157,7 @@
                 </a:solidFill>
                 <a:latin typeface="Calibri"/>
               </a:rPr>
-              <a:t>BADM 225 · Chapter 16</a:t>
+              <a:t>BADM 225 · Chapter 16  ·  © Derek D. Bussan</a:t>
             </a:r>
           </a:p>
         </p:txBody>
@@ -10444,7 +10444,7 @@
                 </a:solidFill>
                 <a:latin typeface="Calibri"/>
               </a:rPr>
-              <a:t>BADM 225 · Chapter 16</a:t>
+              <a:t>BADM 225 · Chapter 16  ·  © Derek D. Bussan</a:t>
             </a:r>
           </a:p>
         </p:txBody>
@@ -10809,7 +10809,7 @@
                 </a:solidFill>
                 <a:latin typeface="Calibri"/>
               </a:rPr>
-              <a:t>BADM 225 · Chapter 16</a:t>
+              <a:t>BADM 225 · Chapter 16  ·  © Derek D. Bussan</a:t>
             </a:r>
           </a:p>
         </p:txBody>
@@ -10937,7 +10937,7 @@
                 </a:solidFill>
                 <a:latin typeface="Calibri"/>
               </a:rPr>
-              <a:t>BADM 225 · Chapter 16</a:t>
+              <a:t>BADM 225 · Chapter 16  ·  © Derek D. Bussan</a:t>
             </a:r>
           </a:p>
         </p:txBody>
@@ -11591,7 +11591,7 @@
                 </a:solidFill>
                 <a:latin typeface="Calibri"/>
               </a:rPr>
-              <a:t>BADM 225 · Chapter 16</a:t>
+              <a:t>BADM 225 · Chapter 16  ·  © Derek D. Bussan</a:t>
             </a:r>
           </a:p>
         </p:txBody>
@@ -11878,7 +11878,7 @@
                 </a:solidFill>
                 <a:latin typeface="Calibri"/>
               </a:rPr>
-              <a:t>BADM 225 · Chapter 16</a:t>
+              <a:t>BADM 225 · Chapter 16  ·  © Derek D. Bussan</a:t>
             </a:r>
           </a:p>
         </p:txBody>
@@ -12165,7 +12165,7 @@
                 </a:solidFill>
                 <a:latin typeface="Calibri"/>
               </a:rPr>
-              <a:t>BADM 225 · Chapter 16</a:t>
+              <a:t>BADM 225 · Chapter 16  ·  © Derek D. Bussan</a:t>
             </a:r>
           </a:p>
         </p:txBody>
@@ -12980,7 +12980,7 @@
                 </a:solidFill>
                 <a:latin typeface="Calibri"/>
               </a:rPr>
-              <a:t>BADM 225 · Chapter 16</a:t>
+              <a:t>BADM 225 · Chapter 16  ·  © Derek D. Bussan</a:t>
             </a:r>
           </a:p>
         </p:txBody>
@@ -13186,7 +13186,7 @@
                 </a:solidFill>
                 <a:latin typeface="Calibri"/>
               </a:rPr>
-              <a:t>BADM 225 · Chapter 16</a:t>
+              <a:t>BADM 225 · Chapter 16  ·  © Derek D. Bussan</a:t>
             </a:r>
           </a:p>
         </p:txBody>
@@ -13462,7 +13462,7 @@
                 </a:solidFill>
                 <a:latin typeface="Calibri"/>
               </a:rPr>
-              <a:t>BADM 225 · Chapter 16</a:t>
+              <a:t>BADM 225 · Chapter 16  ·  © Derek D. Bussan</a:t>
             </a:r>
           </a:p>
         </p:txBody>
@@ -13555,7 +13555,7 @@
                 </a:solidFill>
                 <a:latin typeface="Calibri"/>
               </a:rPr>
-              <a:t>BADM 225 · Chapter 16</a:t>
+              <a:t>BADM 225 · Chapter 16  ·  © Derek D. Bussan</a:t>
             </a:r>
           </a:p>
         </p:txBody>
@@ -13876,7 +13876,7 @@
                 </a:solidFill>
                 <a:latin typeface="Calibri"/>
               </a:rPr>
-              <a:t>BADM 225 · Chapter 16</a:t>
+              <a:t>BADM 225 · Chapter 16  ·  © Derek D. Bussan</a:t>
             </a:r>
           </a:p>
         </p:txBody>
@@ -14163,7 +14163,7 @@
                 </a:solidFill>
                 <a:latin typeface="Calibri"/>
               </a:rPr>
-              <a:t>BADM 225 · Chapter 16</a:t>
+              <a:t>BADM 225 · Chapter 16  ·  © Derek D. Bussan</a:t>
             </a:r>
           </a:p>
         </p:txBody>
@@ -14450,7 +14450,7 @@
                 </a:solidFill>
                 <a:latin typeface="Calibri"/>
               </a:rPr>
-              <a:t>BADM 225 · Chapter 16</a:t>
+              <a:t>BADM 225 · Chapter 16  ·  © Derek D. Bussan</a:t>
             </a:r>
           </a:p>
         </p:txBody>
@@ -15012,7 +15012,7 @@
                 </a:solidFill>
                 <a:latin typeface="Calibri"/>
               </a:rPr>
-              <a:t>BADM 225 · Chapter 16</a:t>
+              <a:t>BADM 225 · Chapter 16  ·  © Derek D. Bussan</a:t>
             </a:r>
           </a:p>
         </p:txBody>
@@ -15377,7 +15377,7 @@
                 </a:solidFill>
                 <a:latin typeface="Calibri"/>
               </a:rPr>
-              <a:t>BADM 225 · Chapter 16</a:t>
+              <a:t>BADM 225 · Chapter 16  ·  © Derek D. Bussan</a:t>
             </a:r>
           </a:p>
         </p:txBody>
@@ -15505,7 +15505,7 @@
                 </a:solidFill>
                 <a:latin typeface="Calibri"/>
               </a:rPr>
-              <a:t>BADM 225 · Chapter 16</a:t>
+              <a:t>BADM 225 · Chapter 16  ·  © Derek D. Bussan</a:t>
             </a:r>
           </a:p>
         </p:txBody>

--- a/slides/ch16-leadership-under-pressure-influence.pptx
+++ b/slides/ch16-leadership-under-pressure-influence.pptx
@@ -5862,7 +5862,7 @@
                 </a:solidFill>
                 <a:latin typeface="Calibri"/>
               </a:rPr>
-              <a:t>BADM 225 · Chapter 16  ·  Original instructional material — no publisher content</a:t>
+              <a:t>BADM 225 · Chapter 16  ·  Original material © 2026 Derek D. Bussan, PhD, MBA  ·  No publisher content</a:t>
             </a:r>
           </a:p>
         </p:txBody>
